--- a/Lectures/Lecture1-ClassOverview.pptx
+++ b/Lectures/Lecture1-ClassOverview.pptx
@@ -5,7 +5,7 @@
     <p:sldMasterId id="2147483659" r:id="rId1"/>
   </p:sldMasterIdLst>
   <p:notesMasterIdLst>
-    <p:notesMasterId r:id="rId20"/>
+    <p:notesMasterId r:id="rId22"/>
   </p:notesMasterIdLst>
   <p:sldIdLst>
     <p:sldId id="256" r:id="rId2"/>
@@ -16,26 +16,28 @@
     <p:sldId id="261" r:id="rId7"/>
     <p:sldId id="297" r:id="rId8"/>
     <p:sldId id="301" r:id="rId9"/>
-    <p:sldId id="262" r:id="rId10"/>
-    <p:sldId id="263" r:id="rId11"/>
-    <p:sldId id="295" r:id="rId12"/>
-    <p:sldId id="299" r:id="rId13"/>
-    <p:sldId id="264" r:id="rId14"/>
-    <p:sldId id="267" r:id="rId15"/>
-    <p:sldId id="269" r:id="rId16"/>
-    <p:sldId id="270" r:id="rId17"/>
-    <p:sldId id="272" r:id="rId18"/>
-    <p:sldId id="273" r:id="rId19"/>
+    <p:sldId id="303" r:id="rId10"/>
+    <p:sldId id="302" r:id="rId11"/>
+    <p:sldId id="262" r:id="rId12"/>
+    <p:sldId id="263" r:id="rId13"/>
+    <p:sldId id="295" r:id="rId14"/>
+    <p:sldId id="299" r:id="rId15"/>
+    <p:sldId id="264" r:id="rId16"/>
+    <p:sldId id="267" r:id="rId17"/>
+    <p:sldId id="269" r:id="rId18"/>
+    <p:sldId id="270" r:id="rId19"/>
+    <p:sldId id="272" r:id="rId20"/>
+    <p:sldId id="273" r:id="rId21"/>
   </p:sldIdLst>
   <p:sldSz cx="9144000" cy="5143500" type="screen16x9"/>
   <p:notesSz cx="6858000" cy="9144000"/>
   <p:embeddedFontLst>
     <p:embeddedFont>
       <p:font typeface="Lato" panose="020F0502020204030203" pitchFamily="34" charset="0"/>
-      <p:regular r:id="rId21"/>
-      <p:bold r:id="rId22"/>
-      <p:italic r:id="rId23"/>
-      <p:boldItalic r:id="rId24"/>
+      <p:regular r:id="rId23"/>
+      <p:bold r:id="rId24"/>
+      <p:italic r:id="rId25"/>
+      <p:boldItalic r:id="rId26"/>
     </p:embeddedFont>
   </p:embeddedFontLst>
   <p:defaultTextStyle>
@@ -14504,6 +14506,483 @@
   <p:cSld>
     <p:spTree>
       <p:nvGrpSpPr>
+        <p:cNvPr id="1" name=""/>
+        <p:cNvGrpSpPr/>
+        <p:nvPr/>
+      </p:nvGrpSpPr>
+      <p:grpSpPr>
+        <a:xfrm>
+          <a:off x="0" y="0"/>
+          <a:ext cx="0" cy="0"/>
+          <a:chOff x="0" y="0"/>
+          <a:chExt cx="0" cy="0"/>
+        </a:xfrm>
+      </p:grpSpPr>
+      <p:pic>
+        <p:nvPicPr>
+          <p:cNvPr id="4" name="Picture 3">
+            <a:extLst>
+              <a:ext uri="{FF2B5EF4-FFF2-40B4-BE49-F238E27FC236}">
+                <a16:creationId xmlns:a16="http://schemas.microsoft.com/office/drawing/2014/main" id="{92C8E416-0351-09FE-B220-C6EE881E124C}"/>
+              </a:ext>
+            </a:extLst>
+          </p:cNvPr>
+          <p:cNvPicPr>
+            <a:picLocks noChangeAspect="1"/>
+          </p:cNvPicPr>
+          <p:nvPr/>
+        </p:nvPicPr>
+        <p:blipFill>
+          <a:blip r:embed="rId2"/>
+          <a:stretch>
+            <a:fillRect/>
+          </a:stretch>
+        </p:blipFill>
+        <p:spPr>
+          <a:xfrm>
+            <a:off x="348343" y="0"/>
+            <a:ext cx="8247017" cy="5138633"/>
+          </a:xfrm>
+          <a:prstGeom prst="rect">
+            <a:avLst/>
+          </a:prstGeom>
+        </p:spPr>
+      </p:pic>
+    </p:spTree>
+    <p:extLst>
+      <p:ext uri="{BB962C8B-B14F-4D97-AF65-F5344CB8AC3E}">
+        <p14:creationId xmlns:p14="http://schemas.microsoft.com/office/powerpoint/2010/main" val="3655989667"/>
+      </p:ext>
+    </p:extLst>
+  </p:cSld>
+  <p:clrMapOvr>
+    <a:masterClrMapping/>
+  </p:clrMapOvr>
+</p:sld>
+</file>
+
+<file path=ppt/slides/slide11.xml><?xml version="1.0" encoding="utf-8"?>
+<p:sld xmlns:a="http://schemas.openxmlformats.org/drawingml/2006/main" xmlns:r="http://schemas.openxmlformats.org/officeDocument/2006/relationships" xmlns:p="http://schemas.openxmlformats.org/presentationml/2006/main">
+  <p:cSld>
+    <p:spTree>
+      <p:nvGrpSpPr>
+        <p:cNvPr id="1" name="Shape 92"/>
+        <p:cNvGrpSpPr/>
+        <p:nvPr/>
+      </p:nvGrpSpPr>
+      <p:grpSpPr>
+        <a:xfrm>
+          <a:off x="0" y="0"/>
+          <a:ext cx="0" cy="0"/>
+          <a:chOff x="0" y="0"/>
+          <a:chExt cx="0" cy="0"/>
+        </a:xfrm>
+      </p:grpSpPr>
+      <p:sp>
+        <p:nvSpPr>
+          <p:cNvPr id="93" name="Google Shape;93;p19"/>
+          <p:cNvSpPr txBox="1">
+            <a:spLocks noGrp="1"/>
+          </p:cNvSpPr>
+          <p:nvPr>
+            <p:ph type="title"/>
+          </p:nvPr>
+        </p:nvSpPr>
+        <p:spPr>
+          <a:xfrm>
+            <a:off x="311700" y="445025"/>
+            <a:ext cx="8520600" cy="572700"/>
+          </a:xfrm>
+          <a:prstGeom prst="rect">
+            <a:avLst/>
+          </a:prstGeom>
+        </p:spPr>
+        <p:txBody>
+          <a:bodyPr spcFirstLastPara="1" wrap="square" lIns="91425" tIns="91425" rIns="91425" bIns="91425" anchor="t" anchorCtr="0">
+            <a:noAutofit/>
+          </a:bodyPr>
+          <a:lstStyle/>
+          <a:p>
+            <a:pPr marL="0" lvl="0" indent="0" algn="l" rtl="0">
+              <a:spcBef>
+                <a:spcPts val="0"/>
+              </a:spcBef>
+              <a:spcAft>
+                <a:spcPts val="0"/>
+              </a:spcAft>
+              <a:buNone/>
+            </a:pPr>
+            <a:r>
+              <a:rPr lang="en" dirty="0"/>
+              <a:t>Skills needed to solve real-world problems (with ML)</a:t>
+            </a:r>
+            <a:endParaRPr dirty="0"/>
+          </a:p>
+        </p:txBody>
+      </p:sp>
+      <p:sp>
+        <p:nvSpPr>
+          <p:cNvPr id="94" name="Google Shape;94;p19"/>
+          <p:cNvSpPr/>
+          <p:nvPr/>
+        </p:nvSpPr>
+        <p:spPr>
+          <a:xfrm>
+            <a:off x="4053800" y="2731425"/>
+            <a:ext cx="1134600" cy="806100"/>
+          </a:xfrm>
+          <a:prstGeom prst="roundRect">
+            <a:avLst>
+              <a:gd name="adj" fmla="val 16667"/>
+            </a:avLst>
+          </a:prstGeom>
+          <a:solidFill>
+            <a:srgbClr val="FCE5CD"/>
+          </a:solidFill>
+          <a:ln w="9525" cap="flat" cmpd="sng">
+            <a:solidFill>
+              <a:schemeClr val="dk2"/>
+            </a:solidFill>
+            <a:prstDash val="solid"/>
+            <a:round/>
+            <a:headEnd type="none" w="sm" len="sm"/>
+            <a:tailEnd type="none" w="sm" len="sm"/>
+          </a:ln>
+        </p:spPr>
+        <p:txBody>
+          <a:bodyPr spcFirstLastPara="1" wrap="square" lIns="91425" tIns="91425" rIns="91425" bIns="91425" anchor="ctr" anchorCtr="0">
+            <a:noAutofit/>
+          </a:bodyPr>
+          <a:lstStyle/>
+          <a:p>
+            <a:pPr marL="0" lvl="0" indent="0" algn="ctr" rtl="0">
+              <a:spcBef>
+                <a:spcPts val="0"/>
+              </a:spcBef>
+              <a:spcAft>
+                <a:spcPts val="0"/>
+              </a:spcAft>
+              <a:buNone/>
+            </a:pPr>
+            <a:r>
+              <a:rPr lang="en" b="1">
+                <a:latin typeface="Lato"/>
+                <a:ea typeface="Lato"/>
+                <a:cs typeface="Lato"/>
+                <a:sym typeface="Lato"/>
+              </a:rPr>
+              <a:t>Classes</a:t>
+            </a:r>
+            <a:endParaRPr b="1">
+              <a:latin typeface="Lato"/>
+              <a:ea typeface="Lato"/>
+              <a:cs typeface="Lato"/>
+              <a:sym typeface="Lato"/>
+            </a:endParaRPr>
+          </a:p>
+        </p:txBody>
+      </p:sp>
+      <p:sp>
+        <p:nvSpPr>
+          <p:cNvPr id="95" name="Google Shape;95;p19"/>
+          <p:cNvSpPr/>
+          <p:nvPr/>
+        </p:nvSpPr>
+        <p:spPr>
+          <a:xfrm>
+            <a:off x="3562550" y="1159900"/>
+            <a:ext cx="2117100" cy="632400"/>
+          </a:xfrm>
+          <a:prstGeom prst="roundRect">
+            <a:avLst>
+              <a:gd name="adj" fmla="val 16667"/>
+            </a:avLst>
+          </a:prstGeom>
+          <a:solidFill>
+            <a:srgbClr val="B45F06"/>
+          </a:solidFill>
+          <a:ln w="9525" cap="flat" cmpd="sng">
+            <a:solidFill>
+              <a:schemeClr val="dk2"/>
+            </a:solidFill>
+            <a:prstDash val="solid"/>
+            <a:round/>
+            <a:headEnd type="none" w="sm" len="sm"/>
+            <a:tailEnd type="none" w="sm" len="sm"/>
+          </a:ln>
+        </p:spPr>
+        <p:txBody>
+          <a:bodyPr spcFirstLastPara="1" wrap="square" lIns="91425" tIns="91425" rIns="91425" bIns="91425" anchor="ctr" anchorCtr="0">
+            <a:noAutofit/>
+          </a:bodyPr>
+          <a:lstStyle/>
+          <a:p>
+            <a:pPr marL="0" lvl="0" indent="0" algn="ctr" rtl="0">
+              <a:spcBef>
+                <a:spcPts val="0"/>
+              </a:spcBef>
+              <a:spcAft>
+                <a:spcPts val="0"/>
+              </a:spcAft>
+              <a:buNone/>
+            </a:pPr>
+            <a:r>
+              <a:rPr lang="en-US" sz="1600" b="1" dirty="0">
+                <a:solidFill>
+                  <a:srgbClr val="FFFFFF"/>
+                </a:solidFill>
+                <a:latin typeface="Lato"/>
+                <a:ea typeface="Lato"/>
+                <a:cs typeface="Lato"/>
+                <a:sym typeface="Lato"/>
+              </a:rPr>
+              <a:t>CS &amp; ML</a:t>
+            </a:r>
+            <a:endParaRPr sz="1600" b="1" dirty="0">
+              <a:solidFill>
+                <a:srgbClr val="FFFFFF"/>
+              </a:solidFill>
+              <a:latin typeface="Lato"/>
+              <a:ea typeface="Lato"/>
+              <a:cs typeface="Lato"/>
+              <a:sym typeface="Lato"/>
+            </a:endParaRPr>
+          </a:p>
+        </p:txBody>
+      </p:sp>
+      <p:sp>
+        <p:nvSpPr>
+          <p:cNvPr id="96" name="Google Shape;96;p19"/>
+          <p:cNvSpPr/>
+          <p:nvPr/>
+        </p:nvSpPr>
+        <p:spPr>
+          <a:xfrm>
+            <a:off x="6111725" y="1439575"/>
+            <a:ext cx="2117100" cy="632400"/>
+          </a:xfrm>
+          <a:prstGeom prst="roundRect">
+            <a:avLst>
+              <a:gd name="adj" fmla="val 16667"/>
+            </a:avLst>
+          </a:prstGeom>
+          <a:solidFill>
+            <a:srgbClr val="B45F06"/>
+          </a:solidFill>
+          <a:ln w="9525" cap="flat" cmpd="sng">
+            <a:solidFill>
+              <a:schemeClr val="dk2"/>
+            </a:solidFill>
+            <a:prstDash val="solid"/>
+            <a:round/>
+            <a:headEnd type="none" w="sm" len="sm"/>
+            <a:tailEnd type="none" w="sm" len="sm"/>
+          </a:ln>
+        </p:spPr>
+        <p:txBody>
+          <a:bodyPr spcFirstLastPara="1" wrap="square" lIns="91425" tIns="91425" rIns="91425" bIns="91425" anchor="ctr" anchorCtr="0">
+            <a:noAutofit/>
+          </a:bodyPr>
+          <a:lstStyle/>
+          <a:p>
+            <a:pPr marL="0" lvl="0" indent="0" algn="ctr" rtl="0">
+              <a:spcBef>
+                <a:spcPts val="0"/>
+              </a:spcBef>
+              <a:spcAft>
+                <a:spcPts val="0"/>
+              </a:spcAft>
+              <a:buNone/>
+            </a:pPr>
+            <a:r>
+              <a:rPr lang="en" sz="1600" b="1">
+                <a:solidFill>
+                  <a:srgbClr val="FFFFFF"/>
+                </a:solidFill>
+                <a:latin typeface="Lato"/>
+                <a:ea typeface="Lato"/>
+                <a:cs typeface="Lato"/>
+                <a:sym typeface="Lato"/>
+              </a:rPr>
+              <a:t>Statistics</a:t>
+            </a:r>
+            <a:endParaRPr sz="1600" b="1">
+              <a:solidFill>
+                <a:srgbClr val="FFFFFF"/>
+              </a:solidFill>
+              <a:latin typeface="Lato"/>
+              <a:ea typeface="Lato"/>
+              <a:cs typeface="Lato"/>
+              <a:sym typeface="Lato"/>
+            </a:endParaRPr>
+          </a:p>
+        </p:txBody>
+      </p:sp>
+      <p:sp>
+        <p:nvSpPr>
+          <p:cNvPr id="97" name="Google Shape;97;p19"/>
+          <p:cNvSpPr/>
+          <p:nvPr/>
+        </p:nvSpPr>
+        <p:spPr>
+          <a:xfrm>
+            <a:off x="6741350" y="2818275"/>
+            <a:ext cx="2117100" cy="632400"/>
+          </a:xfrm>
+          <a:prstGeom prst="roundRect">
+            <a:avLst>
+              <a:gd name="adj" fmla="val 16667"/>
+            </a:avLst>
+          </a:prstGeom>
+          <a:solidFill>
+            <a:srgbClr val="B45F06"/>
+          </a:solidFill>
+          <a:ln w="9525" cap="flat" cmpd="sng">
+            <a:solidFill>
+              <a:schemeClr val="dk2"/>
+            </a:solidFill>
+            <a:prstDash val="solid"/>
+            <a:round/>
+            <a:headEnd type="none" w="sm" len="sm"/>
+            <a:tailEnd type="none" w="sm" len="sm"/>
+          </a:ln>
+        </p:spPr>
+        <p:txBody>
+          <a:bodyPr spcFirstLastPara="1" wrap="square" lIns="91425" tIns="91425" rIns="91425" bIns="91425" anchor="ctr" anchorCtr="0">
+            <a:noAutofit/>
+          </a:bodyPr>
+          <a:lstStyle/>
+          <a:p>
+            <a:pPr marL="0" lvl="0" indent="0" algn="ctr" rtl="0">
+              <a:spcBef>
+                <a:spcPts val="0"/>
+              </a:spcBef>
+              <a:spcAft>
+                <a:spcPts val="0"/>
+              </a:spcAft>
+              <a:buNone/>
+            </a:pPr>
+            <a:r>
+              <a:rPr lang="en" sz="1600" b="1">
+                <a:solidFill>
+                  <a:srgbClr val="FFFFFF"/>
+                </a:solidFill>
+                <a:latin typeface="Lato"/>
+                <a:ea typeface="Lato"/>
+                <a:cs typeface="Lato"/>
+                <a:sym typeface="Lato"/>
+              </a:rPr>
+              <a:t>Social Sciences</a:t>
+            </a:r>
+            <a:endParaRPr sz="1600" b="1">
+              <a:solidFill>
+                <a:srgbClr val="FFFFFF"/>
+              </a:solidFill>
+              <a:latin typeface="Lato"/>
+              <a:ea typeface="Lato"/>
+              <a:cs typeface="Lato"/>
+              <a:sym typeface="Lato"/>
+            </a:endParaRPr>
+          </a:p>
+        </p:txBody>
+      </p:sp>
+      <p:cxnSp>
+        <p:nvCxnSpPr>
+          <p:cNvPr id="98" name="Google Shape;98;p19"/>
+          <p:cNvCxnSpPr>
+            <a:stCxn id="95" idx="2"/>
+            <a:endCxn id="94" idx="0"/>
+          </p:cNvCxnSpPr>
+          <p:nvPr/>
+        </p:nvCxnSpPr>
+        <p:spPr>
+          <a:xfrm>
+            <a:off x="4621100" y="1792300"/>
+            <a:ext cx="0" cy="939000"/>
+          </a:xfrm>
+          <a:prstGeom prst="straightConnector1">
+            <a:avLst/>
+          </a:prstGeom>
+          <a:noFill/>
+          <a:ln w="28575" cap="flat" cmpd="sng">
+            <a:solidFill>
+              <a:schemeClr val="dk2"/>
+            </a:solidFill>
+            <a:prstDash val="solid"/>
+            <a:round/>
+            <a:headEnd type="none" w="med" len="med"/>
+            <a:tailEnd type="none" w="med" len="med"/>
+          </a:ln>
+        </p:spPr>
+      </p:cxnSp>
+      <p:cxnSp>
+        <p:nvCxnSpPr>
+          <p:cNvPr id="99" name="Google Shape;99;p19"/>
+          <p:cNvCxnSpPr/>
+          <p:nvPr/>
+        </p:nvCxnSpPr>
+        <p:spPr>
+          <a:xfrm flipH="1">
+            <a:off x="5171275" y="2078600"/>
+            <a:ext cx="986400" cy="678900"/>
+          </a:xfrm>
+          <a:prstGeom prst="straightConnector1">
+            <a:avLst/>
+          </a:prstGeom>
+          <a:noFill/>
+          <a:ln w="28575" cap="flat" cmpd="sng">
+            <a:solidFill>
+              <a:schemeClr val="dk2"/>
+            </a:solidFill>
+            <a:prstDash val="solid"/>
+            <a:round/>
+            <a:headEnd type="none" w="med" len="med"/>
+            <a:tailEnd type="none" w="med" len="med"/>
+          </a:ln>
+        </p:spPr>
+      </p:cxnSp>
+      <p:cxnSp>
+        <p:nvCxnSpPr>
+          <p:cNvPr id="100" name="Google Shape;100;p19"/>
+          <p:cNvCxnSpPr>
+            <a:stCxn id="97" idx="1"/>
+            <a:endCxn id="94" idx="3"/>
+          </p:cNvCxnSpPr>
+          <p:nvPr/>
+        </p:nvCxnSpPr>
+        <p:spPr>
+          <a:xfrm rot="10800000">
+            <a:off x="5188250" y="3134475"/>
+            <a:ext cx="1553100" cy="0"/>
+          </a:xfrm>
+          <a:prstGeom prst="straightConnector1">
+            <a:avLst/>
+          </a:prstGeom>
+          <a:noFill/>
+          <a:ln w="28575" cap="flat" cmpd="sng">
+            <a:solidFill>
+              <a:schemeClr val="dk2"/>
+            </a:solidFill>
+            <a:prstDash val="solid"/>
+            <a:round/>
+            <a:headEnd type="none" w="med" len="med"/>
+            <a:tailEnd type="none" w="med" len="med"/>
+          </a:ln>
+        </p:spPr>
+      </p:cxnSp>
+    </p:spTree>
+  </p:cSld>
+  <p:clrMapOvr>
+    <a:masterClrMapping/>
+  </p:clrMapOvr>
+</p:sld>
+</file>
+
+<file path=ppt/slides/slide12.xml><?xml version="1.0" encoding="utf-8"?>
+<p:sld xmlns:a="http://schemas.openxmlformats.org/drawingml/2006/main" xmlns:r="http://schemas.openxmlformats.org/officeDocument/2006/relationships" xmlns:p="http://schemas.openxmlformats.org/presentationml/2006/main">
+  <p:cSld>
+    <p:spTree>
+      <p:nvGrpSpPr>
         <p:cNvPr id="1" name="Shape 104"/>
         <p:cNvGrpSpPr/>
         <p:nvPr/>
@@ -15417,7 +15896,7 @@
 </p:sld>
 </file>
 
-<file path=ppt/slides/slide11.xml><?xml version="1.0" encoding="utf-8"?>
+<file path=ppt/slides/slide13.xml><?xml version="1.0" encoding="utf-8"?>
 <p:sld xmlns:a="http://schemas.openxmlformats.org/drawingml/2006/main" xmlns:r="http://schemas.openxmlformats.org/officeDocument/2006/relationships" xmlns:p="http://schemas.openxmlformats.org/presentationml/2006/main">
   <p:cSld>
     <p:spTree>
@@ -15551,7 +16030,7 @@
 </p:sld>
 </file>
 
-<file path=ppt/slides/slide12.xml><?xml version="1.0" encoding="utf-8"?>
+<file path=ppt/slides/slide14.xml><?xml version="1.0" encoding="utf-8"?>
 <p:sld xmlns:a="http://schemas.openxmlformats.org/drawingml/2006/main" xmlns:r="http://schemas.openxmlformats.org/officeDocument/2006/relationships" xmlns:p="http://schemas.openxmlformats.org/presentationml/2006/main">
   <p:cSld>
     <p:spTree>
@@ -15665,7 +16144,7 @@
 </p:sld>
 </file>
 
-<file path=ppt/slides/slide13.xml><?xml version="1.0" encoding="utf-8"?>
+<file path=ppt/slides/slide15.xml><?xml version="1.0" encoding="utf-8"?>
 <p:sld xmlns:a="http://schemas.openxmlformats.org/drawingml/2006/main" xmlns:r="http://schemas.openxmlformats.org/officeDocument/2006/relationships" xmlns:p="http://schemas.openxmlformats.org/presentationml/2006/main">
   <p:cSld>
     <p:spTree>
@@ -15747,7 +16226,7 @@
 </p:sld>
 </file>
 
-<file path=ppt/slides/slide14.xml><?xml version="1.0" encoding="utf-8"?>
+<file path=ppt/slides/slide16.xml><?xml version="1.0" encoding="utf-8"?>
 <p:sld xmlns:a="http://schemas.openxmlformats.org/drawingml/2006/main" xmlns:r="http://schemas.openxmlformats.org/officeDocument/2006/relationships" xmlns:p="http://schemas.openxmlformats.org/presentationml/2006/main">
   <p:cSld>
     <p:spTree>
@@ -16003,7 +16482,7 @@
 </p:sld>
 </file>
 
-<file path=ppt/slides/slide15.xml><?xml version="1.0" encoding="utf-8"?>
+<file path=ppt/slides/slide17.xml><?xml version="1.0" encoding="utf-8"?>
 <p:sld xmlns:a="http://schemas.openxmlformats.org/drawingml/2006/main" xmlns:r="http://schemas.openxmlformats.org/officeDocument/2006/relationships" xmlns:p="http://schemas.openxmlformats.org/presentationml/2006/main">
   <p:cSld>
     <p:spTree>
@@ -16198,7 +16677,7 @@
 </p:sld>
 </file>
 
-<file path=ppt/slides/slide16.xml><?xml version="1.0" encoding="utf-8"?>
+<file path=ppt/slides/slide18.xml><?xml version="1.0" encoding="utf-8"?>
 <p:sld xmlns:a="http://schemas.openxmlformats.org/drawingml/2006/main" xmlns:r="http://schemas.openxmlformats.org/officeDocument/2006/relationships" xmlns:p="http://schemas.openxmlformats.org/presentationml/2006/main">
   <p:cSld>
     <p:spTree>
@@ -16395,7 +16874,7 @@
 </p:sld>
 </file>
 
-<file path=ppt/slides/slide17.xml><?xml version="1.0" encoding="utf-8"?>
+<file path=ppt/slides/slide19.xml><?xml version="1.0" encoding="utf-8"?>
 <p:sld xmlns:a="http://schemas.openxmlformats.org/drawingml/2006/main" xmlns:r="http://schemas.openxmlformats.org/officeDocument/2006/relationships" xmlns:p="http://schemas.openxmlformats.org/presentationml/2006/main">
   <p:cSld>
     <p:spTree>
@@ -16556,186 +17035,6 @@
               <a:rPr lang="en" dirty="0"/>
               <a:t>*nix command line</a:t>
             </a:r>
-          </a:p>
-        </p:txBody>
-      </p:sp>
-    </p:spTree>
-  </p:cSld>
-  <p:clrMapOvr>
-    <a:masterClrMapping/>
-  </p:clrMapOvr>
-</p:sld>
-</file>
-
-<file path=ppt/slides/slide18.xml><?xml version="1.0" encoding="utf-8"?>
-<p:sld xmlns:a="http://schemas.openxmlformats.org/drawingml/2006/main" xmlns:r="http://schemas.openxmlformats.org/officeDocument/2006/relationships" xmlns:p="http://schemas.openxmlformats.org/presentationml/2006/main">
-  <p:cSld>
-    <p:spTree>
-      <p:nvGrpSpPr>
-        <p:cNvPr id="1" name="Shape 183"/>
-        <p:cNvGrpSpPr/>
-        <p:nvPr/>
-      </p:nvGrpSpPr>
-      <p:grpSpPr>
-        <a:xfrm>
-          <a:off x="0" y="0"/>
-          <a:ext cx="0" cy="0"/>
-          <a:chOff x="0" y="0"/>
-          <a:chExt cx="0" cy="0"/>
-        </a:xfrm>
-      </p:grpSpPr>
-      <p:sp>
-        <p:nvSpPr>
-          <p:cNvPr id="184" name="Google Shape;184;p30"/>
-          <p:cNvSpPr txBox="1">
-            <a:spLocks noGrp="1"/>
-          </p:cNvSpPr>
-          <p:nvPr>
-            <p:ph type="title"/>
-          </p:nvPr>
-        </p:nvSpPr>
-        <p:spPr>
-          <a:xfrm>
-            <a:off x="311700" y="445025"/>
-            <a:ext cx="8520600" cy="572700"/>
-          </a:xfrm>
-          <a:prstGeom prst="rect">
-            <a:avLst/>
-          </a:prstGeom>
-        </p:spPr>
-        <p:txBody>
-          <a:bodyPr spcFirstLastPara="1" wrap="square" lIns="91425" tIns="91425" rIns="91425" bIns="91425" anchor="t" anchorCtr="0">
-            <a:noAutofit/>
-          </a:bodyPr>
-          <a:lstStyle/>
-          <a:p>
-            <a:pPr marL="0" lvl="0" indent="0" algn="l" rtl="0">
-              <a:spcBef>
-                <a:spcPts val="0"/>
-              </a:spcBef>
-              <a:spcAft>
-                <a:spcPts val="0"/>
-              </a:spcAft>
-              <a:buNone/>
-            </a:pPr>
-            <a:r>
-              <a:rPr lang="en"/>
-              <a:t>Prep for next class</a:t>
-            </a:r>
-            <a:endParaRPr/>
-          </a:p>
-        </p:txBody>
-      </p:sp>
-      <p:sp>
-        <p:nvSpPr>
-          <p:cNvPr id="185" name="Google Shape;185;p30"/>
-          <p:cNvSpPr txBox="1">
-            <a:spLocks noGrp="1"/>
-          </p:cNvSpPr>
-          <p:nvPr>
-            <p:ph type="body" idx="1"/>
-          </p:nvPr>
-        </p:nvSpPr>
-        <p:spPr>
-          <a:xfrm>
-            <a:off x="311700" y="1152475"/>
-            <a:ext cx="8520600" cy="3416400"/>
-          </a:xfrm>
-          <a:prstGeom prst="rect">
-            <a:avLst/>
-          </a:prstGeom>
-        </p:spPr>
-        <p:txBody>
-          <a:bodyPr spcFirstLastPara="1" wrap="square" lIns="91425" tIns="91425" rIns="91425" bIns="91425" anchor="t" anchorCtr="0">
-            <a:noAutofit/>
-          </a:bodyPr>
-          <a:lstStyle/>
-          <a:p>
-            <a:pPr marL="457200" lvl="0" indent="-342900" algn="l" rtl="0">
-              <a:spcBef>
-                <a:spcPts val="0"/>
-              </a:spcBef>
-              <a:spcAft>
-                <a:spcPts val="0"/>
-              </a:spcAft>
-              <a:buSzPts val="1800"/>
-              <a:buChar char="●"/>
-            </a:pPr>
-            <a:r>
-              <a:rPr lang="en-US" sz="2000" dirty="0"/>
-              <a:t>Explore literature (broadly) to understand key reasons why ML systems may and do fail in production and deployment </a:t>
-            </a:r>
-            <a:endParaRPr lang="en" sz="1600" dirty="0"/>
-          </a:p>
-          <a:p>
-            <a:pPr marL="596900" lvl="1" indent="0" algn="l" rtl="0">
-              <a:spcBef>
-                <a:spcPts val="0"/>
-              </a:spcBef>
-              <a:spcAft>
-                <a:spcPts val="0"/>
-              </a:spcAft>
-              <a:buSzPts val="1400"/>
-              <a:buNone/>
-            </a:pPr>
-            <a:endParaRPr lang="en" dirty="0"/>
-          </a:p>
-          <a:p>
-            <a:pPr marL="596900" lvl="1" indent="0" algn="l" rtl="0">
-              <a:spcBef>
-                <a:spcPts val="0"/>
-              </a:spcBef>
-              <a:spcAft>
-                <a:spcPts val="0"/>
-              </a:spcAft>
-              <a:buSzPts val="1400"/>
-              <a:buNone/>
-            </a:pPr>
-            <a:endParaRPr lang="en" dirty="0"/>
-          </a:p>
-          <a:p>
-            <a:pPr lvl="0"/>
-            <a:r>
-              <a:rPr lang="en-US" sz="2000" b="1" dirty="0"/>
-              <a:t>Assignment</a:t>
-            </a:r>
-          </a:p>
-          <a:p>
-            <a:pPr lvl="1">
-              <a:spcBef>
-                <a:spcPts val="0"/>
-              </a:spcBef>
-            </a:pPr>
-            <a:r>
-              <a:rPr lang="en-US" sz="1600" b="1" dirty="0"/>
-              <a:t>Project Team Creation: ink in canvas</a:t>
-            </a:r>
-          </a:p>
-          <a:p>
-            <a:pPr lvl="1">
-              <a:spcBef>
-                <a:spcPts val="0"/>
-              </a:spcBef>
-            </a:pPr>
-            <a:r>
-              <a:rPr lang="en-US" sz="1600" b="1" dirty="0"/>
-              <a:t>Individual project: First pass on the ML project (due next Tuesday)</a:t>
-            </a:r>
-          </a:p>
-          <a:p>
-            <a:pPr lvl="1">
-              <a:spcBef>
-                <a:spcPts val="0"/>
-              </a:spcBef>
-            </a:pPr>
-            <a:endParaRPr lang="en-US" sz="1600" b="1" dirty="0"/>
-          </a:p>
-          <a:p>
-            <a:pPr marL="139700" indent="0">
-              <a:buSzPts val="1400"/>
-              <a:buNone/>
-            </a:pPr>
-            <a:endParaRPr lang="en" dirty="0"/>
           </a:p>
         </p:txBody>
       </p:sp>
@@ -16823,6 +17122,186 @@
         <p14:creationId xmlns:p14="http://schemas.microsoft.com/office/powerpoint/2010/main" val="2835411929"/>
       </p:ext>
     </p:extLst>
+  </p:cSld>
+  <p:clrMapOvr>
+    <a:masterClrMapping/>
+  </p:clrMapOvr>
+</p:sld>
+</file>
+
+<file path=ppt/slides/slide20.xml><?xml version="1.0" encoding="utf-8"?>
+<p:sld xmlns:a="http://schemas.openxmlformats.org/drawingml/2006/main" xmlns:r="http://schemas.openxmlformats.org/officeDocument/2006/relationships" xmlns:p="http://schemas.openxmlformats.org/presentationml/2006/main">
+  <p:cSld>
+    <p:spTree>
+      <p:nvGrpSpPr>
+        <p:cNvPr id="1" name="Shape 183"/>
+        <p:cNvGrpSpPr/>
+        <p:nvPr/>
+      </p:nvGrpSpPr>
+      <p:grpSpPr>
+        <a:xfrm>
+          <a:off x="0" y="0"/>
+          <a:ext cx="0" cy="0"/>
+          <a:chOff x="0" y="0"/>
+          <a:chExt cx="0" cy="0"/>
+        </a:xfrm>
+      </p:grpSpPr>
+      <p:sp>
+        <p:nvSpPr>
+          <p:cNvPr id="184" name="Google Shape;184;p30"/>
+          <p:cNvSpPr txBox="1">
+            <a:spLocks noGrp="1"/>
+          </p:cNvSpPr>
+          <p:nvPr>
+            <p:ph type="title"/>
+          </p:nvPr>
+        </p:nvSpPr>
+        <p:spPr>
+          <a:xfrm>
+            <a:off x="311700" y="445025"/>
+            <a:ext cx="8520600" cy="572700"/>
+          </a:xfrm>
+          <a:prstGeom prst="rect">
+            <a:avLst/>
+          </a:prstGeom>
+        </p:spPr>
+        <p:txBody>
+          <a:bodyPr spcFirstLastPara="1" wrap="square" lIns="91425" tIns="91425" rIns="91425" bIns="91425" anchor="t" anchorCtr="0">
+            <a:noAutofit/>
+          </a:bodyPr>
+          <a:lstStyle/>
+          <a:p>
+            <a:pPr marL="0" lvl="0" indent="0" algn="l" rtl="0">
+              <a:spcBef>
+                <a:spcPts val="0"/>
+              </a:spcBef>
+              <a:spcAft>
+                <a:spcPts val="0"/>
+              </a:spcAft>
+              <a:buNone/>
+            </a:pPr>
+            <a:r>
+              <a:rPr lang="en"/>
+              <a:t>Prep for next class</a:t>
+            </a:r>
+            <a:endParaRPr/>
+          </a:p>
+        </p:txBody>
+      </p:sp>
+      <p:sp>
+        <p:nvSpPr>
+          <p:cNvPr id="185" name="Google Shape;185;p30"/>
+          <p:cNvSpPr txBox="1">
+            <a:spLocks noGrp="1"/>
+          </p:cNvSpPr>
+          <p:nvPr>
+            <p:ph type="body" idx="1"/>
+          </p:nvPr>
+        </p:nvSpPr>
+        <p:spPr>
+          <a:xfrm>
+            <a:off x="311700" y="1152475"/>
+            <a:ext cx="8520600" cy="3416400"/>
+          </a:xfrm>
+          <a:prstGeom prst="rect">
+            <a:avLst/>
+          </a:prstGeom>
+        </p:spPr>
+        <p:txBody>
+          <a:bodyPr spcFirstLastPara="1" wrap="square" lIns="91425" tIns="91425" rIns="91425" bIns="91425" anchor="t" anchorCtr="0">
+            <a:noAutofit/>
+          </a:bodyPr>
+          <a:lstStyle/>
+          <a:p>
+            <a:pPr marL="457200" lvl="0" indent="-342900" algn="l" rtl="0">
+              <a:spcBef>
+                <a:spcPts val="0"/>
+              </a:spcBef>
+              <a:spcAft>
+                <a:spcPts val="0"/>
+              </a:spcAft>
+              <a:buSzPts val="1800"/>
+              <a:buChar char="●"/>
+            </a:pPr>
+            <a:r>
+              <a:rPr lang="en-US" sz="2000" dirty="0"/>
+              <a:t>Explore literature (broadly) to understand key reasons why ML systems may and do fail in production and deployment </a:t>
+            </a:r>
+            <a:endParaRPr lang="en" sz="1600" dirty="0"/>
+          </a:p>
+          <a:p>
+            <a:pPr marL="596900" lvl="1" indent="0" algn="l" rtl="0">
+              <a:spcBef>
+                <a:spcPts val="0"/>
+              </a:spcBef>
+              <a:spcAft>
+                <a:spcPts val="0"/>
+              </a:spcAft>
+              <a:buSzPts val="1400"/>
+              <a:buNone/>
+            </a:pPr>
+            <a:endParaRPr lang="en" dirty="0"/>
+          </a:p>
+          <a:p>
+            <a:pPr marL="596900" lvl="1" indent="0" algn="l" rtl="0">
+              <a:spcBef>
+                <a:spcPts val="0"/>
+              </a:spcBef>
+              <a:spcAft>
+                <a:spcPts val="0"/>
+              </a:spcAft>
+              <a:buSzPts val="1400"/>
+              <a:buNone/>
+            </a:pPr>
+            <a:endParaRPr lang="en" dirty="0"/>
+          </a:p>
+          <a:p>
+            <a:pPr lvl="0"/>
+            <a:r>
+              <a:rPr lang="en-US" sz="2000" b="1" dirty="0"/>
+              <a:t>Assignment</a:t>
+            </a:r>
+          </a:p>
+          <a:p>
+            <a:pPr lvl="1">
+              <a:spcBef>
+                <a:spcPts val="0"/>
+              </a:spcBef>
+            </a:pPr>
+            <a:r>
+              <a:rPr lang="en-US" sz="1600" b="1" dirty="0"/>
+              <a:t>Project Team Creation: ink in canvas</a:t>
+            </a:r>
+          </a:p>
+          <a:p>
+            <a:pPr lvl="1">
+              <a:spcBef>
+                <a:spcPts val="0"/>
+              </a:spcBef>
+            </a:pPr>
+            <a:r>
+              <a:rPr lang="en-US" sz="1600" b="1" dirty="0"/>
+              <a:t>Individual project: First pass on the ML project (due next Tuesday)</a:t>
+            </a:r>
+          </a:p>
+          <a:p>
+            <a:pPr lvl="1">
+              <a:spcBef>
+                <a:spcPts val="0"/>
+              </a:spcBef>
+            </a:pPr>
+            <a:endParaRPr lang="en-US" sz="1600" b="1" dirty="0"/>
+          </a:p>
+          <a:p>
+            <a:pPr marL="139700" indent="0">
+              <a:buSzPts val="1400"/>
+              <a:buNone/>
+            </a:pPr>
+            <a:endParaRPr lang="en" dirty="0"/>
+          </a:p>
+        </p:txBody>
+      </p:sp>
+    </p:spTree>
   </p:cSld>
   <p:clrMapOvr>
     <a:masterClrMapping/>
@@ -17863,7 +18342,7 @@
   <p:cSld>
     <p:spTree>
       <p:nvGrpSpPr>
-        <p:cNvPr id="1" name="Shape 92"/>
+        <p:cNvPr id="1" name=""/>
         <p:cNvGrpSpPr/>
         <p:nvPr/>
       </p:nvGrpSpPr>
@@ -17877,397 +18356,90 @@
       </p:grpSpPr>
       <p:sp>
         <p:nvSpPr>
-          <p:cNvPr id="93" name="Google Shape;93;p19"/>
-          <p:cNvSpPr txBox="1">
+          <p:cNvPr id="2" name="Title 1">
+            <a:extLst>
+              <a:ext uri="{FF2B5EF4-FFF2-40B4-BE49-F238E27FC236}">
+                <a16:creationId xmlns:a16="http://schemas.microsoft.com/office/drawing/2014/main" id="{326B6C04-2E07-FEE4-3381-2B5C87102A40}"/>
+              </a:ext>
+            </a:extLst>
+          </p:cNvPr>
+          <p:cNvSpPr>
             <a:spLocks noGrp="1"/>
           </p:cNvSpPr>
           <p:nvPr>
             <p:ph type="title"/>
           </p:nvPr>
         </p:nvSpPr>
+        <p:spPr/>
+        <p:txBody>
+          <a:bodyPr/>
+          <a:lstStyle/>
+          <a:p>
+            <a:endParaRPr lang="en-US"/>
+          </a:p>
+        </p:txBody>
+      </p:sp>
+      <p:sp>
+        <p:nvSpPr>
+          <p:cNvPr id="3" name="Text Placeholder 2">
+            <a:extLst>
+              <a:ext uri="{FF2B5EF4-FFF2-40B4-BE49-F238E27FC236}">
+                <a16:creationId xmlns:a16="http://schemas.microsoft.com/office/drawing/2014/main" id="{A7AF6FFD-980B-9FFB-2016-3CE8A5C3C051}"/>
+              </a:ext>
+            </a:extLst>
+          </p:cNvPr>
+          <p:cNvSpPr>
+            <a:spLocks noGrp="1"/>
+          </p:cNvSpPr>
+          <p:nvPr>
+            <p:ph type="body" idx="1"/>
+          </p:nvPr>
+        </p:nvSpPr>
+        <p:spPr/>
+        <p:txBody>
+          <a:bodyPr/>
+          <a:lstStyle/>
+          <a:p>
+            <a:endParaRPr lang="en-US"/>
+          </a:p>
+        </p:txBody>
+      </p:sp>
+      <p:pic>
+        <p:nvPicPr>
+          <p:cNvPr id="4" name="Picture 3">
+            <a:extLst>
+              <a:ext uri="{FF2B5EF4-FFF2-40B4-BE49-F238E27FC236}">
+                <a16:creationId xmlns:a16="http://schemas.microsoft.com/office/drawing/2014/main" id="{84A80FD0-87C1-CA10-6FA6-24EC38FB5BA2}"/>
+              </a:ext>
+            </a:extLst>
+          </p:cNvPr>
+          <p:cNvPicPr>
+            <a:picLocks noChangeAspect="1"/>
+          </p:cNvPicPr>
+          <p:nvPr/>
+        </p:nvPicPr>
+        <p:blipFill>
+          <a:blip r:embed="rId2"/>
+          <a:stretch>
+            <a:fillRect/>
+          </a:stretch>
+        </p:blipFill>
         <p:spPr>
           <a:xfrm>
-            <a:off x="311700" y="445025"/>
-            <a:ext cx="8520600" cy="572700"/>
+            <a:off x="0" y="-17418"/>
+            <a:ext cx="9144000" cy="5138056"/>
           </a:xfrm>
           <a:prstGeom prst="rect">
             <a:avLst/>
           </a:prstGeom>
         </p:spPr>
-        <p:txBody>
-          <a:bodyPr spcFirstLastPara="1" wrap="square" lIns="91425" tIns="91425" rIns="91425" bIns="91425" anchor="t" anchorCtr="0">
-            <a:noAutofit/>
-          </a:bodyPr>
-          <a:lstStyle/>
-          <a:p>
-            <a:pPr marL="0" lvl="0" indent="0" algn="l" rtl="0">
-              <a:spcBef>
-                <a:spcPts val="0"/>
-              </a:spcBef>
-              <a:spcAft>
-                <a:spcPts val="0"/>
-              </a:spcAft>
-              <a:buNone/>
-            </a:pPr>
-            <a:r>
-              <a:rPr lang="en" dirty="0"/>
-              <a:t>Skills needed to solve real-world problems (with ML)</a:t>
-            </a:r>
-            <a:endParaRPr dirty="0"/>
-          </a:p>
-        </p:txBody>
-      </p:sp>
-      <p:sp>
-        <p:nvSpPr>
-          <p:cNvPr id="94" name="Google Shape;94;p19"/>
-          <p:cNvSpPr/>
-          <p:nvPr/>
-        </p:nvSpPr>
-        <p:spPr>
-          <a:xfrm>
-            <a:off x="4053800" y="2731425"/>
-            <a:ext cx="1134600" cy="806100"/>
-          </a:xfrm>
-          <a:prstGeom prst="roundRect">
-            <a:avLst>
-              <a:gd name="adj" fmla="val 16667"/>
-            </a:avLst>
-          </a:prstGeom>
-          <a:solidFill>
-            <a:srgbClr val="FCE5CD"/>
-          </a:solidFill>
-          <a:ln w="9525" cap="flat" cmpd="sng">
-            <a:solidFill>
-              <a:schemeClr val="dk2"/>
-            </a:solidFill>
-            <a:prstDash val="solid"/>
-            <a:round/>
-            <a:headEnd type="none" w="sm" len="sm"/>
-            <a:tailEnd type="none" w="sm" len="sm"/>
-          </a:ln>
-        </p:spPr>
-        <p:txBody>
-          <a:bodyPr spcFirstLastPara="1" wrap="square" lIns="91425" tIns="91425" rIns="91425" bIns="91425" anchor="ctr" anchorCtr="0">
-            <a:noAutofit/>
-          </a:bodyPr>
-          <a:lstStyle/>
-          <a:p>
-            <a:pPr marL="0" lvl="0" indent="0" algn="ctr" rtl="0">
-              <a:spcBef>
-                <a:spcPts val="0"/>
-              </a:spcBef>
-              <a:spcAft>
-                <a:spcPts val="0"/>
-              </a:spcAft>
-              <a:buNone/>
-            </a:pPr>
-            <a:r>
-              <a:rPr lang="en" b="1">
-                <a:latin typeface="Lato"/>
-                <a:ea typeface="Lato"/>
-                <a:cs typeface="Lato"/>
-                <a:sym typeface="Lato"/>
-              </a:rPr>
-              <a:t>Classes</a:t>
-            </a:r>
-            <a:endParaRPr b="1">
-              <a:latin typeface="Lato"/>
-              <a:ea typeface="Lato"/>
-              <a:cs typeface="Lato"/>
-              <a:sym typeface="Lato"/>
-            </a:endParaRPr>
-          </a:p>
-        </p:txBody>
-      </p:sp>
-      <p:sp>
-        <p:nvSpPr>
-          <p:cNvPr id="95" name="Google Shape;95;p19"/>
-          <p:cNvSpPr/>
-          <p:nvPr/>
-        </p:nvSpPr>
-        <p:spPr>
-          <a:xfrm>
-            <a:off x="3562550" y="1159900"/>
-            <a:ext cx="2117100" cy="632400"/>
-          </a:xfrm>
-          <a:prstGeom prst="roundRect">
-            <a:avLst>
-              <a:gd name="adj" fmla="val 16667"/>
-            </a:avLst>
-          </a:prstGeom>
-          <a:solidFill>
-            <a:srgbClr val="B45F06"/>
-          </a:solidFill>
-          <a:ln w="9525" cap="flat" cmpd="sng">
-            <a:solidFill>
-              <a:schemeClr val="dk2"/>
-            </a:solidFill>
-            <a:prstDash val="solid"/>
-            <a:round/>
-            <a:headEnd type="none" w="sm" len="sm"/>
-            <a:tailEnd type="none" w="sm" len="sm"/>
-          </a:ln>
-        </p:spPr>
-        <p:txBody>
-          <a:bodyPr spcFirstLastPara="1" wrap="square" lIns="91425" tIns="91425" rIns="91425" bIns="91425" anchor="ctr" anchorCtr="0">
-            <a:noAutofit/>
-          </a:bodyPr>
-          <a:lstStyle/>
-          <a:p>
-            <a:pPr marL="0" lvl="0" indent="0" algn="ctr" rtl="0">
-              <a:spcBef>
-                <a:spcPts val="0"/>
-              </a:spcBef>
-              <a:spcAft>
-                <a:spcPts val="0"/>
-              </a:spcAft>
-              <a:buNone/>
-            </a:pPr>
-            <a:r>
-              <a:rPr lang="en-US" sz="1600" b="1" dirty="0">
-                <a:solidFill>
-                  <a:srgbClr val="FFFFFF"/>
-                </a:solidFill>
-                <a:latin typeface="Lato"/>
-                <a:ea typeface="Lato"/>
-                <a:cs typeface="Lato"/>
-                <a:sym typeface="Lato"/>
-              </a:rPr>
-              <a:t>CS &amp; ML</a:t>
-            </a:r>
-            <a:endParaRPr sz="1600" b="1" dirty="0">
-              <a:solidFill>
-                <a:srgbClr val="FFFFFF"/>
-              </a:solidFill>
-              <a:latin typeface="Lato"/>
-              <a:ea typeface="Lato"/>
-              <a:cs typeface="Lato"/>
-              <a:sym typeface="Lato"/>
-            </a:endParaRPr>
-          </a:p>
-        </p:txBody>
-      </p:sp>
-      <p:sp>
-        <p:nvSpPr>
-          <p:cNvPr id="96" name="Google Shape;96;p19"/>
-          <p:cNvSpPr/>
-          <p:nvPr/>
-        </p:nvSpPr>
-        <p:spPr>
-          <a:xfrm>
-            <a:off x="6111725" y="1439575"/>
-            <a:ext cx="2117100" cy="632400"/>
-          </a:xfrm>
-          <a:prstGeom prst="roundRect">
-            <a:avLst>
-              <a:gd name="adj" fmla="val 16667"/>
-            </a:avLst>
-          </a:prstGeom>
-          <a:solidFill>
-            <a:srgbClr val="B45F06"/>
-          </a:solidFill>
-          <a:ln w="9525" cap="flat" cmpd="sng">
-            <a:solidFill>
-              <a:schemeClr val="dk2"/>
-            </a:solidFill>
-            <a:prstDash val="solid"/>
-            <a:round/>
-            <a:headEnd type="none" w="sm" len="sm"/>
-            <a:tailEnd type="none" w="sm" len="sm"/>
-          </a:ln>
-        </p:spPr>
-        <p:txBody>
-          <a:bodyPr spcFirstLastPara="1" wrap="square" lIns="91425" tIns="91425" rIns="91425" bIns="91425" anchor="ctr" anchorCtr="0">
-            <a:noAutofit/>
-          </a:bodyPr>
-          <a:lstStyle/>
-          <a:p>
-            <a:pPr marL="0" lvl="0" indent="0" algn="ctr" rtl="0">
-              <a:spcBef>
-                <a:spcPts val="0"/>
-              </a:spcBef>
-              <a:spcAft>
-                <a:spcPts val="0"/>
-              </a:spcAft>
-              <a:buNone/>
-            </a:pPr>
-            <a:r>
-              <a:rPr lang="en" sz="1600" b="1">
-                <a:solidFill>
-                  <a:srgbClr val="FFFFFF"/>
-                </a:solidFill>
-                <a:latin typeface="Lato"/>
-                <a:ea typeface="Lato"/>
-                <a:cs typeface="Lato"/>
-                <a:sym typeface="Lato"/>
-              </a:rPr>
-              <a:t>Statistics</a:t>
-            </a:r>
-            <a:endParaRPr sz="1600" b="1">
-              <a:solidFill>
-                <a:srgbClr val="FFFFFF"/>
-              </a:solidFill>
-              <a:latin typeface="Lato"/>
-              <a:ea typeface="Lato"/>
-              <a:cs typeface="Lato"/>
-              <a:sym typeface="Lato"/>
-            </a:endParaRPr>
-          </a:p>
-        </p:txBody>
-      </p:sp>
-      <p:sp>
-        <p:nvSpPr>
-          <p:cNvPr id="97" name="Google Shape;97;p19"/>
-          <p:cNvSpPr/>
-          <p:nvPr/>
-        </p:nvSpPr>
-        <p:spPr>
-          <a:xfrm>
-            <a:off x="6741350" y="2818275"/>
-            <a:ext cx="2117100" cy="632400"/>
-          </a:xfrm>
-          <a:prstGeom prst="roundRect">
-            <a:avLst>
-              <a:gd name="adj" fmla="val 16667"/>
-            </a:avLst>
-          </a:prstGeom>
-          <a:solidFill>
-            <a:srgbClr val="B45F06"/>
-          </a:solidFill>
-          <a:ln w="9525" cap="flat" cmpd="sng">
-            <a:solidFill>
-              <a:schemeClr val="dk2"/>
-            </a:solidFill>
-            <a:prstDash val="solid"/>
-            <a:round/>
-            <a:headEnd type="none" w="sm" len="sm"/>
-            <a:tailEnd type="none" w="sm" len="sm"/>
-          </a:ln>
-        </p:spPr>
-        <p:txBody>
-          <a:bodyPr spcFirstLastPara="1" wrap="square" lIns="91425" tIns="91425" rIns="91425" bIns="91425" anchor="ctr" anchorCtr="0">
-            <a:noAutofit/>
-          </a:bodyPr>
-          <a:lstStyle/>
-          <a:p>
-            <a:pPr marL="0" lvl="0" indent="0" algn="ctr" rtl="0">
-              <a:spcBef>
-                <a:spcPts val="0"/>
-              </a:spcBef>
-              <a:spcAft>
-                <a:spcPts val="0"/>
-              </a:spcAft>
-              <a:buNone/>
-            </a:pPr>
-            <a:r>
-              <a:rPr lang="en" sz="1600" b="1">
-                <a:solidFill>
-                  <a:srgbClr val="FFFFFF"/>
-                </a:solidFill>
-                <a:latin typeface="Lato"/>
-                <a:ea typeface="Lato"/>
-                <a:cs typeface="Lato"/>
-                <a:sym typeface="Lato"/>
-              </a:rPr>
-              <a:t>Social Sciences</a:t>
-            </a:r>
-            <a:endParaRPr sz="1600" b="1">
-              <a:solidFill>
-                <a:srgbClr val="FFFFFF"/>
-              </a:solidFill>
-              <a:latin typeface="Lato"/>
-              <a:ea typeface="Lato"/>
-              <a:cs typeface="Lato"/>
-              <a:sym typeface="Lato"/>
-            </a:endParaRPr>
-          </a:p>
-        </p:txBody>
-      </p:sp>
-      <p:cxnSp>
-        <p:nvCxnSpPr>
-          <p:cNvPr id="98" name="Google Shape;98;p19"/>
-          <p:cNvCxnSpPr>
-            <a:stCxn id="95" idx="2"/>
-            <a:endCxn id="94" idx="0"/>
-          </p:cNvCxnSpPr>
-          <p:nvPr/>
-        </p:nvCxnSpPr>
-        <p:spPr>
-          <a:xfrm>
-            <a:off x="4621100" y="1792300"/>
-            <a:ext cx="0" cy="939000"/>
-          </a:xfrm>
-          <a:prstGeom prst="straightConnector1">
-            <a:avLst/>
-          </a:prstGeom>
-          <a:noFill/>
-          <a:ln w="28575" cap="flat" cmpd="sng">
-            <a:solidFill>
-              <a:schemeClr val="dk2"/>
-            </a:solidFill>
-            <a:prstDash val="solid"/>
-            <a:round/>
-            <a:headEnd type="none" w="med" len="med"/>
-            <a:tailEnd type="none" w="med" len="med"/>
-          </a:ln>
-        </p:spPr>
-      </p:cxnSp>
-      <p:cxnSp>
-        <p:nvCxnSpPr>
-          <p:cNvPr id="99" name="Google Shape;99;p19"/>
-          <p:cNvCxnSpPr/>
-          <p:nvPr/>
-        </p:nvCxnSpPr>
-        <p:spPr>
-          <a:xfrm flipH="1">
-            <a:off x="5171275" y="2078600"/>
-            <a:ext cx="986400" cy="678900"/>
-          </a:xfrm>
-          <a:prstGeom prst="straightConnector1">
-            <a:avLst/>
-          </a:prstGeom>
-          <a:noFill/>
-          <a:ln w="28575" cap="flat" cmpd="sng">
-            <a:solidFill>
-              <a:schemeClr val="dk2"/>
-            </a:solidFill>
-            <a:prstDash val="solid"/>
-            <a:round/>
-            <a:headEnd type="none" w="med" len="med"/>
-            <a:tailEnd type="none" w="med" len="med"/>
-          </a:ln>
-        </p:spPr>
-      </p:cxnSp>
-      <p:cxnSp>
-        <p:nvCxnSpPr>
-          <p:cNvPr id="100" name="Google Shape;100;p19"/>
-          <p:cNvCxnSpPr>
-            <a:stCxn id="97" idx="1"/>
-            <a:endCxn id="94" idx="3"/>
-          </p:cNvCxnSpPr>
-          <p:nvPr/>
-        </p:nvCxnSpPr>
-        <p:spPr>
-          <a:xfrm rot="10800000">
-            <a:off x="5188250" y="3134475"/>
-            <a:ext cx="1553100" cy="0"/>
-          </a:xfrm>
-          <a:prstGeom prst="straightConnector1">
-            <a:avLst/>
-          </a:prstGeom>
-          <a:noFill/>
-          <a:ln w="28575" cap="flat" cmpd="sng">
-            <a:solidFill>
-              <a:schemeClr val="dk2"/>
-            </a:solidFill>
-            <a:prstDash val="solid"/>
-            <a:round/>
-            <a:headEnd type="none" w="med" len="med"/>
-            <a:tailEnd type="none" w="med" len="med"/>
-          </a:ln>
-        </p:spPr>
-      </p:cxnSp>
+      </p:pic>
     </p:spTree>
+    <p:extLst>
+      <p:ext uri="{BB962C8B-B14F-4D97-AF65-F5344CB8AC3E}">
+        <p14:creationId xmlns:p14="http://schemas.microsoft.com/office/powerpoint/2010/main" val="3963580635"/>
+      </p:ext>
+    </p:extLst>
   </p:cSld>
   <p:clrMapOvr>
     <a:masterClrMapping/>
